--- a/apps/web/public/reader-sample.pptx
+++ b/apps/web/public/reader-sample.pptx
@@ -1,11 +1,12 @@
 
 <file path=ppt/presentation.xml><?xml version="1.0" encoding="utf-8"?>
-<p:presentation xmlns:p="http://schemas.openxmlformats.org/presentationml/2006/main" xmlns:r="http://schemas.openxmlformats.org/officeDocument/2006/relationships">
+<p:presentation xmlns:a="http://schemas.openxmlformats.org/drawingml/2006/main" xmlns:p="http://schemas.openxmlformats.org/presentationml/2006/main" xmlns:r="http://schemas.openxmlformats.org/officeDocument/2006/relationships">
   <p:sldIdLst>
-    <p:sldId id="256" r:id="rId3"/>
-    <p:sldId id="257" r:id="rId1"/>
-    <p:sldId id="258" r:id="rId2"/>
+    <p:sldId id="256" r:id="rId1"/>
+    <p:sldId id="257" r:id="rId2"/>
+    <p:sldId id="258" r:id="rId3"/>
   </p:sldIdLst>
+  <p:sldSz cx="12192000" cy="6858000"/>
 </p:presentation>
 </file>
 
@@ -15,32 +16,18 @@
     <p:spTree>
       <p:sp>
         <p:nvSpPr>
-          <p:cNvPr id="2" name="s"/>
-          <p:nvPr>
-            <p:ph type="sldNum"/>
-          </p:nvPr>
-        </p:nvSpPr>
-        <p:txBody>
-          <a:p>
-            <a:pPr lvl="0"/>
-            <a:r>
-              <a:t>2</a:t>
-            </a:r>
-          </a:p>
-        </p:txBody>
-      </p:sp>
-      <p:sp>
-        <p:nvSpPr>
-          <p:cNvPr id="2" name="s"/>
+          <p:cNvPr id="2" name="n"/>
           <p:nvPr>
             <p:ph type="body"/>
           </p:nvPr>
         </p:nvSpPr>
         <p:txBody>
-          <a:p>
-            <a:pPr lvl="0"/>
-            <a:r>
-              <a:t>Say out loud that these are reconstructions, not renders. Real rasters need a layout engine we do not host yet.</a:t>
+          <a:bodyPr/>
+          <a:p>
+            <a:pPr lvl="0"/>
+            <a:r>
+              <a:rPr/>
+              <a:t>This deck is a fixture. Every slide in it carries the geometry a real deck carries.</a:t>
             </a:r>
           </a:p>
         </p:txBody>
@@ -48,6 +35,96 @@
     </p:spTree>
   </p:cSld>
 </p:notes>
+</file>
+
+<file path=ppt/slideLayouts/slideLayout1.xml><?xml version="1.0" encoding="utf-8"?>
+<p:sldLayout xmlns:a="http://schemas.openxmlformats.org/drawingml/2006/main" xmlns:p="http://schemas.openxmlformats.org/presentationml/2006/main" xmlns:r="http://schemas.openxmlformats.org/officeDocument/2006/relationships">
+  <p:cSld>
+    <p:spTree>
+      <p:sp>
+        <p:nvSpPr>
+          <p:cNvPr id="1" name="sp1"/>
+          <p:cNvSpPr/>
+          <p:nvPr>
+            <p:ph type="title"/>
+          </p:nvPr>
+        </p:nvSpPr>
+        <p:spPr>
+          <a:xfrm>
+            <a:off x="731520" y="480060"/>
+            <a:ext cx="10728960" cy="1165860"/>
+          </a:xfrm>
+        </p:spPr>
+        <p:txBody>
+          <a:bodyPr/>
+        </p:txBody>
+      </p:sp>
+      <p:sp>
+        <p:nvSpPr>
+          <p:cNvPr id="2" name="sp2"/>
+          <p:cNvSpPr/>
+          <p:nvPr>
+            <p:ph idx="1" type="body"/>
+          </p:nvPr>
+        </p:nvSpPr>
+        <p:spPr>
+          <a:xfrm>
+            <a:off x="731520" y="2057400"/>
+            <a:ext cx="5120640" cy="4114800"/>
+          </a:xfrm>
+        </p:spPr>
+        <p:txBody>
+          <a:bodyPr/>
+        </p:txBody>
+      </p:sp>
+      <p:sp>
+        <p:nvSpPr>
+          <p:cNvPr id="3" name="sp3"/>
+          <p:cNvSpPr/>
+          <p:nvPr>
+            <p:ph idx="2" type="body"/>
+          </p:nvPr>
+        </p:nvSpPr>
+        <p:spPr>
+          <a:xfrm>
+            <a:off x="6339840" y="2057400"/>
+            <a:ext cx="5120640" cy="4114800"/>
+          </a:xfrm>
+        </p:spPr>
+        <p:txBody>
+          <a:bodyPr/>
+        </p:txBody>
+      </p:sp>
+    </p:spTree>
+  </p:cSld>
+</p:sldLayout>
+</file>
+
+<file path=ppt/slideMasters/slideMaster1.xml><?xml version="1.0" encoding="utf-8"?>
+<p:sldMaster xmlns:a="http://schemas.openxmlformats.org/drawingml/2006/main" xmlns:p="http://schemas.openxmlformats.org/presentationml/2006/main" xmlns:r="http://schemas.openxmlformats.org/officeDocument/2006/relationships">
+  <p:cSld>
+    <p:spTree>
+      <p:sp>
+        <p:nvSpPr>
+          <p:cNvPr id="1" name="sp1"/>
+          <p:cNvSpPr/>
+          <p:nvPr>
+            <p:ph type="ftr"/>
+          </p:nvPr>
+        </p:nvSpPr>
+        <p:spPr>
+          <a:xfrm>
+            <a:off x="731520" y="6172200"/>
+            <a:ext cx="10728960" cy="411480"/>
+          </a:xfrm>
+        </p:spPr>
+        <p:txBody>
+          <a:bodyPr/>
+        </p:txBody>
+      </p:sp>
+    </p:spTree>
+  </p:cSld>
+</p:sldMaster>
 </file>
 
 <file path=ppt/slides/slide1.xml><?xml version="1.0" encoding="utf-8"?>
@@ -56,15 +133,19 @@
     <p:spTree>
       <p:sp>
         <p:nvSpPr>
-          <p:cNvPr id="2" name="s"/>
+          <p:cNvPr id="2" name="sp2"/>
+          <p:cNvSpPr/>
           <p:nvPr>
             <p:ph type="title"/>
           </p:nvPr>
         </p:nvSpPr>
-        <p:txBody>
-          <a:p>
-            <a:pPr lvl="0"/>
-            <a:r>
+        <p:spPr/>
+        <p:txBody>
+          <a:bodyPr/>
+          <a:p>
+            <a:pPr lvl="0"/>
+            <a:r>
+              <a:rPr sz="3400" b="1"/>
               <a:t>What a deck actually contains</a:t>
             </a:r>
           </a:p>
@@ -72,25 +153,33 @@
       </p:sp>
       <p:sp>
         <p:nvSpPr>
-          <p:cNvPr id="2" name="s"/>
-          <p:nvPr/>
-        </p:nvSpPr>
-        <p:txBody>
-          <a:p>
-            <a:pPr lvl="0"/>
-            <a:r>
+          <p:cNvPr id="3" name="sp3"/>
+          <p:cNvSpPr/>
+          <p:nvPr>
+            <p:ph idx="1" type="body"/>
+          </p:nvPr>
+        </p:nvSpPr>
+        <p:spPr/>
+        <p:txBody>
+          <a:bodyPr/>
+          <a:p>
+            <a:pPr lvl="0"/>
+            <a:r>
+              <a:rPr/>
               <a:t>A slide is text, pictures and notes in a zip file</a:t>
             </a:r>
           </a:p>
           <a:p>
             <a:pPr lvl="0"/>
             <a:r>
+              <a:rPr/>
               <a:t>Not a picture of a slide</a:t>
             </a:r>
           </a:p>
           <a:p>
             <a:pPr lvl="1"/>
             <a:r>
+              <a:rPr/>
               <a:t>Which is why this view says what it is</a:t>
             </a:r>
           </a:p>
@@ -107,15 +196,19 @@
     <p:spTree>
       <p:sp>
         <p:nvSpPr>
-          <p:cNvPr id="2" name="s"/>
+          <p:cNvPr id="2" name="sp2"/>
+          <p:cNvSpPr/>
           <p:nvPr>
             <p:ph type="title"/>
           </p:nvPr>
         </p:nvSpPr>
-        <p:txBody>
-          <a:p>
-            <a:pPr lvl="0"/>
-            <a:r>
+        <p:spPr/>
+        <p:txBody>
+          <a:bodyPr/>
+          <a:p>
+            <a:pPr lvl="0"/>
+            <a:r>
+              <a:rPr sz="3000" b="1"/>
               <a:t>Order comes from the deck, not the filenames</a:t>
             </a:r>
           </a:p>
@@ -123,20 +216,54 @@
       </p:sp>
       <p:sp>
         <p:nvSpPr>
-          <p:cNvPr id="2" name="s"/>
-          <p:nvPr/>
-        </p:nvSpPr>
-        <p:txBody>
-          <a:p>
-            <a:pPr lvl="0"/>
-            <a:r>
+          <p:cNvPr id="3" name="sp3"/>
+          <p:cNvSpPr/>
+          <p:nvPr>
+            <p:ph idx="1" type="body"/>
+          </p:nvPr>
+        </p:nvSpPr>
+        <p:spPr/>
+        <p:txBody>
+          <a:bodyPr/>
+          <a:p>
+            <a:pPr lvl="0"/>
+            <a:r>
+              <a:rPr/>
               <a:t>slide10.xml sorts before slide2.xml</a:t>
             </a:r>
           </a:p>
           <a:p>
             <a:pPr lvl="0"/>
             <a:r>
-              <a:t>So the order is read from presentation.xml</a:t>
+              <a:rPr/>
+              <a:t>so the order is read from presentation.xml</a:t>
+            </a:r>
+          </a:p>
+        </p:txBody>
+      </p:sp>
+      <p:sp>
+        <p:nvSpPr>
+          <p:cNvPr id="4" name="sp4"/>
+          <p:cNvSpPr/>
+          <p:nvPr>
+            <p:ph idx="2" type="body"/>
+          </p:nvPr>
+        </p:nvSpPr>
+        <p:spPr/>
+        <p:txBody>
+          <a:bodyPr/>
+          <a:p>
+            <a:pPr lvl="0"/>
+            <a:r>
+              <a:rPr/>
+              <a:t>A deck whose slides were reordered</a:t>
+            </a:r>
+          </a:p>
+          <a:p>
+            <a:pPr lvl="0"/>
+            <a:r>
+              <a:rPr/>
+              <a:t>has filenames that mean nothing at all</a:t>
             </a:r>
           </a:p>
         </p:txBody>
@@ -152,15 +279,19 @@
     <p:spTree>
       <p:sp>
         <p:nvSpPr>
-          <p:cNvPr id="2" name="s"/>
+          <p:cNvPr id="2" name="sp2"/>
+          <p:cNvSpPr/>
           <p:nvPr>
             <p:ph type="title"/>
           </p:nvPr>
         </p:nvSpPr>
-        <p:txBody>
-          <a:p>
-            <a:pPr lvl="0"/>
-            <a:r>
+        <p:spPr/>
+        <p:txBody>
+          <a:bodyPr/>
+          <a:p>
+            <a:pPr lvl="0"/>
+            <a:r>
+              <a:rPr sz="3000" b="1"/>
               <a:t>Speaker notes are the lecturer's own words</a:t>
             </a:r>
           </a:p>
@@ -168,18 +299,62 @@
       </p:sp>
       <p:sp>
         <p:nvSpPr>
-          <p:cNvPr id="2" name="s"/>
-          <p:nvPr/>
-        </p:nvSpPr>
-        <p:txBody>
-          <a:p>
-            <a:pPr lvl="0"/>
-            <a:r>
+          <p:cNvPr id="3" name="sp3"/>
+          <p:cNvSpPr/>
+          <p:nvPr>
+            <p:ph idx="1" type="body"/>
+          </p:nvPr>
+        </p:nvSpPr>
+        <p:spPr/>
+        <p:txBody>
+          <a:bodyPr/>
+          <a:p>
+            <a:pPr lvl="0"/>
+            <a:r>
+              <a:rPr/>
               <a:t>They are usually where the exam hints live</a:t>
             </a:r>
           </a:p>
         </p:txBody>
       </p:sp>
+      <p:grpSp>
+        <p:nvGrpSpPr>
+          <p:cNvPr id="9" name="g"/>
+        </p:nvGrpSpPr>
+        <p:grpSpPr>
+          <a:xfrm>
+            <a:off x="731520" y="5212080"/>
+            <a:ext cx="10728960" cy="822960"/>
+            <a:chOff x="0" y="0"/>
+            <a:chExt cx="1000" cy="1000"/>
+          </a:xfrm>
+        </p:grpSpPr>
+        <p:sp>
+          <p:nvSpPr>
+            <p:cNvPr id="10" name="sp10"/>
+            <p:cNvSpPr/>
+            <p:nvPr/>
+          </p:nvSpPr>
+          <p:spPr>
+            <a:xfrm>
+              <a:off x="0" y="0"/>
+              <a:ext cx="1000" cy="1000"/>
+            </a:xfrm>
+          </p:spPr>
+          <p:txBody>
+            <a:bodyPr/>
+            <a:p>
+              <a:pPr lvl="0" algn="ctr">
+                <a:buNone/>
+              </a:pPr>
+              <a:r>
+                <a:rPr sz="1800"/>
+                <a:t>In a group, and still in the right place</a:t>
+              </a:r>
+            </a:p>
+          </p:txBody>
+        </p:sp>
+      </p:grpSp>
     </p:spTree>
   </p:cSld>
 </p:sld>
